--- a/ppt/店巡_VeriPatrol_GOAI2026决赛答辩.pptx
+++ b/ppt/店巡_VeriPatrol_GOAI2026决赛答辩.pptx
@@ -5809,7 +5809,7 @@
                 <a:ea typeface="Microsoft YaHei" pitchFamily="34" charset="-122"/>
                 <a:cs typeface="Microsoft YaHei" pitchFamily="34" charset="-120"/>
               </a:rPr>
-              <a:t>店巡 Agent (VeriPatrol) · 逐光团队</a:t>
+              <a:t>店巡 Agent (VeriPatrol) · 逐光团队｜夏志强（浙江吉利控股）、马荣（OPPO）</a:t>
             </a:r>
             <a:endParaRPr lang="en-US" sz="1800" dirty="0"/>
           </a:p>
